--- a/images/5/No.5-3.pptx
+++ b/images/5/No.5-3.pptx
@@ -3168,7 +3168,7 @@
           <a:p>
             <a:pPr algn="ctr"/>
             <a:r>
-              <a:rPr lang="en-US" altLang="zh-CN" sz="35000">
+              <a:rPr lang="en-US" altLang="zh-CN" sz="24300">
                 <a:solidFill>
                   <a:schemeClr val="bg1"/>
                 </a:solidFill>
@@ -3195,7 +3195,7 @@
         </p:nvSpPr>
         <p:spPr>
           <a:xfrm>
-            <a:off x="5988685" y="17213580"/>
+            <a:off x="5988685" y="16000730"/>
             <a:ext cx="7526020" cy="994410"/>
           </a:xfrm>
           <a:prstGeom prst="rect">
